--- a/public/recursos-semana-3/presentacion-semana-3.pptx
+++ b/public/recursos-semana-3/presentacion-semana-3.pptx
@@ -1589,7 +1589,7 @@
       </p:grpSpPr>
       <p:pic>
         <p:nvPicPr>
-          <p:cNvPr id="2" name="Image 0" descr="/home/claude/work/r47/logo-cimiento-small.png">    </p:cNvPr>
+          <p:cNvPr id="2" name="Image 0" descr="/home/claude/work/b/cimiento-bloque1/tools/materiales/out/cache/logo-cimiento-small.png">    </p:cNvPr>
           <p:cNvPicPr>
             <a:picLocks noChangeAspect="1"/>
           </p:cNvPicPr>
@@ -1613,7 +1613,7 @@
       </p:pic>
       <p:pic>
         <p:nvPicPr>
-          <p:cNvPr id="3" name="Image 1" descr="/home/claude/work/r47/logo-ieoh-badge.png">    </p:cNvPr>
+          <p:cNvPr id="3" name="Image 1" descr="/home/claude/work/b/cimiento-bloque1/tools/materiales/out/cache/logo-ieoh-badge.png">    </p:cNvPr>
           <p:cNvPicPr>
             <a:picLocks noChangeAspect="1"/>
           </p:cNvPicPr>
@@ -1715,7 +1715,7 @@
       </p:sp>
       <p:pic>
         <p:nvPicPr>
-          <p:cNvPr id="6" name="Image 2" descr="/home/claude/work/r47/ill_heart_hands.png">    </p:cNvPr>
+          <p:cNvPr id="6" name="Image 2" descr="/home/claude/work/b/cimiento-bloque1/tools/materiales/out/cache/ill_heart_hands.png">    </p:cNvPr>
           <p:cNvPicPr>
             <a:picLocks noChangeAspect="1"/>
           </p:cNvPicPr>
@@ -1729,7 +1729,7 @@
         </p:blipFill>
         <p:spPr>
           <a:xfrm>
-            <a:off x="7315200" y="3566160"/>
+            <a:off x="7315200" y="3657600"/>
             <a:ext cx="2286000" cy="2286000"/>
           </a:xfrm>
           <a:prstGeom prst="rect">
@@ -1739,7 +1739,7 @@
       </p:pic>
       <p:pic>
         <p:nvPicPr>
-          <p:cNvPr id="7" name="Image 3" descr="/home/claude/work/r47/nina_wave.png">    </p:cNvPr>
+          <p:cNvPr id="7" name="Image 3" descr="/home/claude/work/b/cimiento-bloque1/tools/materiales/out/cache/nino_wave_900.png">    </p:cNvPr>
           <p:cNvPicPr>
             <a:picLocks noChangeAspect="1"/>
           </p:cNvPicPr>
@@ -1753,8 +1753,8 @@
         </p:blipFill>
         <p:spPr>
           <a:xfrm>
-            <a:off x="4480560" y="3749040"/>
-            <a:ext cx="1664208" cy="2834640"/>
+            <a:off x="4480560" y="3840480"/>
+            <a:ext cx="1764792" cy="2651760"/>
           </a:xfrm>
           <a:prstGeom prst="rect">
             <a:avLst/>
@@ -1821,7 +1821,7 @@
         </p:nvSpPr>
         <p:spPr>
           <a:xfrm>
-            <a:off x="548640" y="2103120"/>
+            <a:off x="548640" y="1828800"/>
             <a:ext cx="11064240" cy="1645920"/>
           </a:xfrm>
           <a:prstGeom prst="rect">
@@ -1854,7 +1854,7 @@
       </p:sp>
       <p:pic>
         <p:nvPicPr>
-          <p:cNvPr id="4" name="Image 0" descr="/home/claude/work/r47/ill_heart_hands.png">    </p:cNvPr>
+          <p:cNvPr id="4" name="Image 0" descr="/home/claude/work/b/cimiento-bloque1/tools/materiales/out/cache/ill_heart_hands.png">    </p:cNvPr>
           <p:cNvPicPr>
             <a:picLocks noChangeAspect="1"/>
           </p:cNvPicPr>
@@ -2084,7 +2084,7 @@
       </p:sp>
       <p:pic>
         <p:nvPicPr>
-          <p:cNvPr id="4" name="Image 0" descr="/home/claude/work/r47/ill_heart_hands.png">    </p:cNvPr>
+          <p:cNvPr id="4" name="Image 0" descr="/home/claude/work/b/cimiento-bloque1/tools/materiales/out/cache/ill_heart_hands.png">    </p:cNvPr>
           <p:cNvPicPr>
             <a:picLocks noChangeAspect="1"/>
           </p:cNvPicPr>
@@ -2171,7 +2171,7 @@
       </p:sp>
       <p:pic>
         <p:nvPicPr>
-          <p:cNvPr id="7" name="Image 1" descr="/home/claude/work/r47/nina_wave.png">    </p:cNvPr>
+          <p:cNvPr id="7" name="Image 1" descr="/home/claude/work/b/cimiento-bloque1/tools/materiales/out/cache/nino_stand_900.png">    </p:cNvPr>
           <p:cNvPicPr>
             <a:picLocks noChangeAspect="1"/>
           </p:cNvPicPr>
@@ -2258,7 +2258,7 @@
       </p:sp>
       <p:pic>
         <p:nvPicPr>
-          <p:cNvPr id="10" name="Image 2" descr="/home/claude/work/r47/ill_sun.png">    </p:cNvPr>
+          <p:cNvPr id="10" name="Image 2" descr="/home/claude/work/b/cimiento-bloque1/tools/materiales/out/cache/ill_sun.png">    </p:cNvPr>
           <p:cNvPicPr>
             <a:picLocks noChangeAspect="1"/>
           </p:cNvPicPr>
@@ -2352,7 +2352,7 @@
       </p:grpSpPr>
       <p:pic>
         <p:nvPicPr>
-          <p:cNvPr id="2" name="Image 0" descr="/home/claude/work/r47/ill_heart_hands.png">    </p:cNvPr>
+          <p:cNvPr id="2" name="Image 0" descr="/home/claude/work/b/cimiento-bloque1/tools/materiales/out/cache/ill_heart_hands.png">    </p:cNvPr>
           <p:cNvPicPr>
             <a:picLocks noChangeAspect="1"/>
           </p:cNvPicPr>
@@ -2541,24 +2541,7 @@
                 <a:ea typeface="Cambria" pitchFamily="34" charset="-122"/>
                 <a:cs typeface="Cambria" pitchFamily="34" charset="-120"/>
               </a:rPr>
-              <a:t>¿Qué es algo que te gusta,</a:t>
-            </a:r>
-            <a:endParaRPr lang="en-US" sz="3200" dirty="0"/>
-          </a:p>
-          <a:p>
-            <a:pPr algn="ctr" indent="0" marL="0">
-              <a:buNone/>
-            </a:pPr>
-            <a:r>
-              <a:rPr lang="en-US" sz="3200" b="1" dirty="0">
-                <a:solidFill>
-                  <a:srgbClr val="0E2338"/>
-                </a:solidFill>
-                <a:latin typeface="Cambria" pitchFamily="34" charset="0"/>
-                <a:ea typeface="Cambria" pitchFamily="34" charset="-122"/>
-                <a:cs typeface="Cambria" pitchFamily="34" charset="-120"/>
-              </a:rPr>
-              <a:t>y que Dios ya sabía que te iba a gustar?</a:t>
+              <a:t>¿Qué es algo que te gusta, y que Dios ya sabía que te iba a gustar?</a:t>
             </a:r>
             <a:endParaRPr lang="en-US" sz="3200" dirty="0"/>
           </a:p>
@@ -2860,32 +2843,15 @@
                 <a:ea typeface="Calibri" pitchFamily="34" charset="-122"/>
                 <a:cs typeface="Calibri" pitchFamily="34" charset="-120"/>
               </a:rPr>
-              <a:t>Completa tu tarjeta con tu nombre</a:t>
+              <a:t>Completa tu tarjeta con tu nombre y algo que te gusta — ¡Dios ya lo sabía!</a:t>
             </a:r>
             <a:endParaRPr lang="en-US" sz="2600" dirty="0"/>
           </a:p>
-          <a:p>
-            <a:pPr algn="ctr" indent="0" marL="0">
-              <a:buNone/>
-            </a:pPr>
-            <a:r>
-              <a:rPr lang="en-US" sz="2600" dirty="0">
-                <a:solidFill>
-                  <a:srgbClr val="0E2338"/>
-                </a:solidFill>
-                <a:latin typeface="Calibri" pitchFamily="34" charset="0"/>
-                <a:ea typeface="Calibri" pitchFamily="34" charset="-122"/>
-                <a:cs typeface="Calibri" pitchFamily="34" charset="-120"/>
-              </a:rPr>
-              <a:t>y algo que te gusta — ¡Dios ya lo sabía!</a:t>
-            </a:r>
-            <a:endParaRPr lang="en-US" sz="2600" dirty="0"/>
-          </a:p>
         </p:txBody>
       </p:sp>
       <p:pic>
         <p:nvPicPr>
-          <p:cNvPr id="5" name="Image 0" descr="/home/claude/work/r47/ill_heart_hands.png">    </p:cNvPr>
+          <p:cNvPr id="5" name="Image 0" descr="/home/claude/work/b/cimiento-bloque1/tools/materiales/out/cache/ill_heart_hands.png">    </p:cNvPr>
           <p:cNvPicPr>
             <a:picLocks noChangeAspect="1"/>
           </p:cNvPicPr>
@@ -2909,7 +2875,7 @@
       </p:pic>
       <p:pic>
         <p:nvPicPr>
-          <p:cNvPr id="6" name="Image 1" descr="/home/claude/work/r47/nino_wave.png">    </p:cNvPr>
+          <p:cNvPr id="6" name="Image 1" descr="/home/claude/work/b/cimiento-bloque1/tools/materiales/out/cache/nina_wave_900.png">    </p:cNvPr>
           <p:cNvPicPr>
             <a:picLocks noChangeAspect="1"/>
           </p:cNvPicPr>
@@ -2924,7 +2890,7 @@
         <p:spPr>
           <a:xfrm>
             <a:off x="9784080" y="4206240"/>
-            <a:ext cx="1344168" cy="2286000"/>
+            <a:ext cx="1527048" cy="2286000"/>
           </a:xfrm>
           <a:prstGeom prst="rect">
             <a:avLst/>
@@ -2965,7 +2931,7 @@
       </p:grpSpPr>
       <p:pic>
         <p:nvPicPr>
-          <p:cNvPr id="2" name="Image 0" descr="/home/claude/work/r47/logo-cimiento-small.png">    </p:cNvPr>
+          <p:cNvPr id="2" name="Image 0" descr="/home/claude/work/b/cimiento-bloque1/tools/materiales/out/cache/logo-cimiento-small.png">    </p:cNvPr>
           <p:cNvPicPr>
             <a:picLocks noChangeAspect="1"/>
           </p:cNvPicPr>
@@ -2989,7 +2955,7 @@
       </p:pic>
       <p:pic>
         <p:nvPicPr>
-          <p:cNvPr id="3" name="Image 1" descr="/home/claude/work/r47/logo-ieoh-badge.png">    </p:cNvPr>
+          <p:cNvPr id="3" name="Image 1" descr="/home/claude/work/b/cimiento-bloque1/tools/materiales/out/cache/logo-ieoh-badge.png">    </p:cNvPr>
           <p:cNvPicPr>
             <a:picLocks noChangeAspect="1"/>
           </p:cNvPicPr>
@@ -3044,24 +3010,7 @@
                 <a:ea typeface="Cambria" pitchFamily="34" charset="-122"/>
                 <a:cs typeface="Cambria" pitchFamily="34" charset="-120"/>
               </a:rPr>
-              <a:t>Gracias, Dios,</a:t>
-            </a:r>
-            <a:endParaRPr lang="en-US" sz="4200" dirty="0"/>
-          </a:p>
-          <a:p>
-            <a:pPr algn="ctr" indent="0" marL="0">
-              <a:buNone/>
-            </a:pPr>
-            <a:r>
-              <a:rPr lang="en-US" sz="4200" b="1" dirty="0">
-                <a:solidFill>
-                  <a:srgbClr val="FDFCFA"/>
-                </a:solidFill>
-                <a:latin typeface="Cambria" pitchFamily="34" charset="0"/>
-                <a:ea typeface="Cambria" pitchFamily="34" charset="-122"/>
-                <a:cs typeface="Cambria" pitchFamily="34" charset="-120"/>
-              </a:rPr>
-              <a:t>porque me conoces por completo.</a:t>
+              <a:t>Gracias, Dios, porque me conoces por completo.</a:t>
             </a:r>
             <a:endParaRPr lang="en-US" sz="4200" dirty="0"/>
           </a:p>
